--- a/docs/Atelier_Pratique_Pipeline_STM32Cube_working_copy.pptx
+++ b/docs/Atelier_Pratique_Pipeline_STM32Cube_working_copy.pptx
@@ -38,9 +38,9 @@
     <p:sldId id="286" r:id="rId32"/>
     <p:sldId id="287" r:id="rId33"/>
     <p:sldId id="288" r:id="rId34"/>
-    <p:sldId id="289" r:id="rId41"/>
-    <p:sldId id="290" r:id="rId42"/>
-    <p:sldId id="291" r:id="rId43"/>
+    <p:sldId id="289" r:id="rId35"/>
+    <p:sldId id="290" r:id="rId36"/>
+    <p:sldId id="291" r:id="rId37"/>
   </p:sldIdLst>
   <p:sldSz cx="9144000" cy="6858000" type="screen4x3"/>
   <p:notesSz cx="6858000" cy="9144000"/>
@@ -171,7 +171,7 @@
   <pc:docChgLst>
     <pc:chgData name="Abir GHARBI" userId="ef92528f-00ab-4d87-966c-386bca485bd0" providerId="ADAL" clId="{F3D16DED-CAA7-4BF5-81E4-89DEDE7057F7}"/>
     <pc:docChg chg="undo custSel modSld">
-      <pc:chgData name="Abir GHARBI" userId="ef92528f-00ab-4d87-966c-386bca485bd0" providerId="ADAL" clId="{F3D16DED-CAA7-4BF5-81E4-89DEDE7057F7}" dt="2026-06-25T16:05:30.912" v="70" actId="404"/>
+      <pc:chgData name="Abir GHARBI" userId="ef92528f-00ab-4d87-966c-386bca485bd0" providerId="ADAL" clId="{F3D16DED-CAA7-4BF5-81E4-89DEDE7057F7}" dt="2026-06-26T08:06:27.778" v="85" actId="20577"/>
       <pc:docMkLst>
         <pc:docMk/>
       </pc:docMkLst>
@@ -366,7 +366,7 @@
         </pc:spChg>
       </pc:sldChg>
       <pc:sldChg chg="modSp mod">
-        <pc:chgData name="Abir GHARBI" userId="ef92528f-00ab-4d87-966c-386bca485bd0" providerId="ADAL" clId="{F3D16DED-CAA7-4BF5-81E4-89DEDE7057F7}" dt="2026-06-25T16:05:30.912" v="70" actId="404"/>
+        <pc:chgData name="Abir GHARBI" userId="ef92528f-00ab-4d87-966c-386bca485bd0" providerId="ADAL" clId="{F3D16DED-CAA7-4BF5-81E4-89DEDE7057F7}" dt="2026-06-26T08:06:27.778" v="85" actId="20577"/>
         <pc:sldMkLst>
           <pc:docMk/>
           <pc:sldMk cId="0" sldId="288"/>
@@ -380,10 +380,40 @@
           </ac:spMkLst>
         </pc:spChg>
         <pc:spChg chg="mod">
-          <ac:chgData name="Abir GHARBI" userId="ef92528f-00ab-4d87-966c-386bca485bd0" providerId="ADAL" clId="{F3D16DED-CAA7-4BF5-81E4-89DEDE7057F7}" dt="2026-06-25T16:05:30.912" v="70" actId="404"/>
+          <ac:chgData name="Abir GHARBI" userId="ef92528f-00ab-4d87-966c-386bca485bd0" providerId="ADAL" clId="{F3D16DED-CAA7-4BF5-81E4-89DEDE7057F7}" dt="2026-06-26T08:06:27.778" v="85" actId="20577"/>
           <ac:spMkLst>
             <pc:docMk/>
             <pc:sldMk cId="0" sldId="288"/>
+            <ac:spMk id="3" creationId="{00000000-0000-0000-0000-000000000000}"/>
+          </ac:spMkLst>
+        </pc:spChg>
+      </pc:sldChg>
+      <pc:sldChg chg="modSp mod">
+        <pc:chgData name="Abir GHARBI" userId="ef92528f-00ab-4d87-966c-386bca485bd0" providerId="ADAL" clId="{F3D16DED-CAA7-4BF5-81E4-89DEDE7057F7}" dt="2026-06-26T07:57:57.550" v="76" actId="20577"/>
+        <pc:sldMkLst>
+          <pc:docMk/>
+          <pc:sldMk cId="0" sldId="289"/>
+        </pc:sldMkLst>
+        <pc:spChg chg="mod">
+          <ac:chgData name="Abir GHARBI" userId="ef92528f-00ab-4d87-966c-386bca485bd0" providerId="ADAL" clId="{F3D16DED-CAA7-4BF5-81E4-89DEDE7057F7}" dt="2026-06-26T07:57:57.550" v="76" actId="20577"/>
+          <ac:spMkLst>
+            <pc:docMk/>
+            <pc:sldMk cId="0" sldId="289"/>
+            <ac:spMk id="3" creationId="{00000000-0000-0000-0000-000000000000}"/>
+          </ac:spMkLst>
+        </pc:spChg>
+      </pc:sldChg>
+      <pc:sldChg chg="modSp mod">
+        <pc:chgData name="Abir GHARBI" userId="ef92528f-00ab-4d87-966c-386bca485bd0" providerId="ADAL" clId="{F3D16DED-CAA7-4BF5-81E4-89DEDE7057F7}" dt="2026-06-26T07:58:48.547" v="82" actId="1076"/>
+        <pc:sldMkLst>
+          <pc:docMk/>
+          <pc:sldMk cId="0" sldId="290"/>
+        </pc:sldMkLst>
+        <pc:spChg chg="mod">
+          <ac:chgData name="Abir GHARBI" userId="ef92528f-00ab-4d87-966c-386bca485bd0" providerId="ADAL" clId="{F3D16DED-CAA7-4BF5-81E4-89DEDE7057F7}" dt="2026-06-26T07:58:48.547" v="82" actId="1076"/>
+          <ac:spMkLst>
+            <pc:docMk/>
+            <pc:sldMk cId="0" sldId="290"/>
             <ac:spMk id="3" creationId="{00000000-0000-0000-0000-000000000000}"/>
           </ac:spMkLst>
         </pc:spChg>
@@ -572,7 +602,7 @@
           <a:p>
             <a:fld id="{5BCAD085-E8A6-8845-BD4E-CB4CCA059FC4}" type="datetimeFigureOut">
               <a:rPr lang="en-US" smtClean="0"/>
-              <a:t>6/25/2026</a:t>
+              <a:t>6/26/2026</a:t>
             </a:fld>
             <a:endParaRPr lang="en-US"/>
           </a:p>
@@ -740,7 +770,7 @@
           <a:p>
             <a:fld id="{5BCAD085-E8A6-8845-BD4E-CB4CCA059FC4}" type="datetimeFigureOut">
               <a:rPr lang="en-US" smtClean="0"/>
-              <a:t>6/25/2026</a:t>
+              <a:t>6/26/2026</a:t>
             </a:fld>
             <a:endParaRPr lang="en-US"/>
           </a:p>
@@ -918,7 +948,7 @@
           <a:p>
             <a:fld id="{5BCAD085-E8A6-8845-BD4E-CB4CCA059FC4}" type="datetimeFigureOut">
               <a:rPr lang="en-US" smtClean="0"/>
-              <a:t>6/25/2026</a:t>
+              <a:t>6/26/2026</a:t>
             </a:fld>
             <a:endParaRPr lang="en-US"/>
           </a:p>
@@ -1086,7 +1116,7 @@
           <a:p>
             <a:fld id="{5BCAD085-E8A6-8845-BD4E-CB4CCA059FC4}" type="datetimeFigureOut">
               <a:rPr lang="en-US" smtClean="0"/>
-              <a:t>6/25/2026</a:t>
+              <a:t>6/26/2026</a:t>
             </a:fld>
             <a:endParaRPr lang="en-US"/>
           </a:p>
@@ -1331,7 +1361,7 @@
           <a:p>
             <a:fld id="{5BCAD085-E8A6-8845-BD4E-CB4CCA059FC4}" type="datetimeFigureOut">
               <a:rPr lang="en-US" smtClean="0"/>
-              <a:t>6/25/2026</a:t>
+              <a:t>6/26/2026</a:t>
             </a:fld>
             <a:endParaRPr lang="en-US"/>
           </a:p>
@@ -1616,7 +1646,7 @@
           <a:p>
             <a:fld id="{5BCAD085-E8A6-8845-BD4E-CB4CCA059FC4}" type="datetimeFigureOut">
               <a:rPr lang="en-US" smtClean="0"/>
-              <a:t>6/25/2026</a:t>
+              <a:t>6/26/2026</a:t>
             </a:fld>
             <a:endParaRPr lang="en-US"/>
           </a:p>
@@ -2035,7 +2065,7 @@
           <a:p>
             <a:fld id="{5BCAD085-E8A6-8845-BD4E-CB4CCA059FC4}" type="datetimeFigureOut">
               <a:rPr lang="en-US" smtClean="0"/>
-              <a:t>6/25/2026</a:t>
+              <a:t>6/26/2026</a:t>
             </a:fld>
             <a:endParaRPr lang="en-US"/>
           </a:p>
@@ -2152,7 +2182,7 @@
           <a:p>
             <a:fld id="{5BCAD085-E8A6-8845-BD4E-CB4CCA059FC4}" type="datetimeFigureOut">
               <a:rPr lang="en-US" smtClean="0"/>
-              <a:t>6/25/2026</a:t>
+              <a:t>6/26/2026</a:t>
             </a:fld>
             <a:endParaRPr lang="en-US"/>
           </a:p>
@@ -2247,7 +2277,7 @@
           <a:p>
             <a:fld id="{5BCAD085-E8A6-8845-BD4E-CB4CCA059FC4}" type="datetimeFigureOut">
               <a:rPr lang="en-US" smtClean="0"/>
-              <a:t>6/25/2026</a:t>
+              <a:t>6/26/2026</a:t>
             </a:fld>
             <a:endParaRPr lang="en-US"/>
           </a:p>
@@ -2522,7 +2552,7 @@
           <a:p>
             <a:fld id="{5BCAD085-E8A6-8845-BD4E-CB4CCA059FC4}" type="datetimeFigureOut">
               <a:rPr lang="en-US" smtClean="0"/>
-              <a:t>6/25/2026</a:t>
+              <a:t>6/26/2026</a:t>
             </a:fld>
             <a:endParaRPr lang="en-US"/>
           </a:p>
@@ -2774,7 +2804,7 @@
           <a:p>
             <a:fld id="{5BCAD085-E8A6-8845-BD4E-CB4CCA059FC4}" type="datetimeFigureOut">
               <a:rPr lang="en-US" smtClean="0"/>
-              <a:t>6/25/2026</a:t>
+              <a:t>6/26/2026</a:t>
             </a:fld>
             <a:endParaRPr lang="en-US"/>
           </a:p>
@@ -2985,7 +3015,7 @@
           <a:p>
             <a:fld id="{5BCAD085-E8A6-8845-BD4E-CB4CCA059FC4}" type="datetimeFigureOut">
               <a:rPr lang="en-US" smtClean="0"/>
-              <a:t>6/25/2026</a:t>
+              <a:t>6/26/2026</a:t>
             </a:fld>
             <a:endParaRPr lang="en-US"/>
           </a:p>
@@ -15333,6 +15363,10 @@
               <a:rPr sz="2000" dirty="0"/>
               <a:t>Issue: compile warnings avec flags GCC</a:t>
             </a:r>
+            <a:endParaRPr lang="fr-FR" sz="2000" dirty="0"/>
+          </a:p>
+          <a:p>
+            <a:endParaRPr sz="2000" dirty="0"/>
           </a:p>
           <a:p>
             <a:r>
@@ -15347,6 +15381,10 @@
               <a:rPr sz="2000" dirty="0"/>
               <a:t>: [IMAGE DESCRIPTION] Screenshot of the STM32CubeIDE 'About' dialog...</a:t>
             </a:r>
+            <a:endParaRPr lang="fr-FR" sz="2000" dirty="0"/>
+          </a:p>
+          <a:p>
+            <a:endParaRPr sz="2000" dirty="0"/>
           </a:p>
           <a:p>
             <a:r>
@@ -15361,6 +15399,10 @@
               <a:rPr sz="2000" dirty="0"/>
               <a:t>): Version STM32CubeIDE 2.0.0 + Build 26820...</a:t>
             </a:r>
+            <a:endParaRPr lang="fr-FR" sz="2000" dirty="0"/>
+          </a:p>
+          <a:p>
+            <a:endParaRPr sz="2000" dirty="0"/>
           </a:p>
           <a:p>
             <a:r>
@@ -15403,7 +15445,7 @@
 </file>
 
 <file path=ppt/slides/slide34.xml><?xml version="1.0" encoding="utf-8"?>
-<p:sld xmlns:a="http://schemas.openxmlformats.org/drawingml/2006/main" xmlns:p="http://schemas.openxmlformats.org/presentationml/2006/main" xmlns:r="http://schemas.openxmlformats.org/officeDocument/2006/relationships">
+<p:sld xmlns:a="http://schemas.openxmlformats.org/drawingml/2006/main" xmlns:r="http://schemas.openxmlformats.org/officeDocument/2006/relationships" xmlns:p="http://schemas.openxmlformats.org/presentationml/2006/main">
   <p:cSld>
     <p:spTree>
       <p:nvGrpSpPr>
@@ -15411,7 +15453,14 @@
         <p:cNvGrpSpPr/>
         <p:nvPr/>
       </p:nvGrpSpPr>
-      <p:grpSpPr/>
+      <p:grpSpPr>
+        <a:xfrm>
+          <a:off x="0" y="0"/>
+          <a:ext cx="0" cy="0"/>
+          <a:chOff x="0" y="0"/>
+          <a:chExt cx="0" cy="0"/>
+        </a:xfrm>
+      </p:grpSpPr>
       <p:sp>
         <p:nvSpPr>
           <p:cNvPr id="2" name="Title 1"/>
@@ -15429,6 +15478,352 @@
           <a:p>
             <a:r>
               <a:t>Preuve concrete - Issue #335 (avant/apres Alfred)</a:t>
+            </a:r>
+          </a:p>
+        </p:txBody>
+      </p:sp>
+      <p:sp>
+        <p:nvSpPr>
+          <p:cNvPr id="3" name="Content Placeholder 2"/>
+          <p:cNvSpPr>
+            <a:spLocks noGrp="1"/>
+          </p:cNvSpPr>
+          <p:nvPr>
+            <p:ph idx="1"/>
+          </p:nvPr>
+        </p:nvSpPr>
+        <p:spPr>
+          <a:xfrm>
+            <a:off x="457200" y="1828800"/>
+            <a:ext cx="8229600" cy="4525963"/>
+          </a:xfrm>
+        </p:spPr>
+        <p:txBody>
+          <a:bodyPr>
+            <a:normAutofit/>
+          </a:bodyPr>
+          <a:lstStyle/>
+          <a:p>
+            <a:r>
+              <a:rPr sz="1800" dirty="0"/>
+              <a:t>JSON </a:t>
+            </a:r>
+            <a:r>
+              <a:rPr sz="1800" dirty="0" err="1"/>
+              <a:t>concret</a:t>
+            </a:r>
+            <a:r>
+              <a:rPr sz="1800" dirty="0"/>
+              <a:t> compare (H7): st_ready_issues_with_images_stm32cubeh7.json vs ..._</a:t>
+            </a:r>
+            <a:r>
+              <a:rPr sz="1800" dirty="0" err="1"/>
+              <a:t>with_alfred_image_text.json</a:t>
+            </a:r>
+            <a:endParaRPr lang="fr-FR" sz="1800" dirty="0"/>
+          </a:p>
+          <a:p>
+            <a:endParaRPr sz="1800" dirty="0"/>
+          </a:p>
+          <a:p>
+            <a:r>
+              <a:rPr sz="1800" dirty="0"/>
+              <a:t>Extrait A: [IMAGE DESCRIPTION] Screenshot of an Eclipse/STM32CubeIDE project properties window on Tool Settings...</a:t>
+            </a:r>
+            <a:endParaRPr lang="fr-FR" sz="1800" dirty="0"/>
+          </a:p>
+          <a:p>
+            <a:endParaRPr sz="1800" dirty="0"/>
+          </a:p>
+          <a:p>
+            <a:r>
+              <a:rPr sz="1800" dirty="0"/>
+              <a:t>Extrait B: [IMAGE DESCRIPTION] Screenshot of an Eclipse-based STM32CubeIDE project properties/build settings window...</a:t>
+            </a:r>
+            <a:endParaRPr lang="fr-FR" sz="1800" dirty="0"/>
+          </a:p>
+          <a:p>
+            <a:endParaRPr sz="1800" dirty="0"/>
+          </a:p>
+          <a:p>
+            <a:r>
+              <a:rPr sz="1800" dirty="0"/>
+              <a:t>Verdict: description </a:t>
+            </a:r>
+            <a:r>
+              <a:rPr sz="1800" dirty="0" err="1"/>
+              <a:t>pertinente</a:t>
+            </a:r>
+            <a:r>
+              <a:rPr sz="1800" dirty="0"/>
+              <a:t> et utile pour retrieval (</a:t>
+            </a:r>
+            <a:r>
+              <a:rPr sz="1800" dirty="0" err="1"/>
+              <a:t>contexte</a:t>
+            </a:r>
+            <a:r>
+              <a:rPr sz="1800" dirty="0"/>
+              <a:t> build/linker bien capture).</a:t>
+            </a:r>
+            <a:endParaRPr lang="fr-FR" sz="1800" dirty="0"/>
+          </a:p>
+          <a:p>
+            <a:endParaRPr sz="1800" dirty="0"/>
+          </a:p>
+          <a:p>
+            <a:r>
+              <a:rPr sz="1800" dirty="0"/>
+              <a:t>Critique: formulation </a:t>
+            </a:r>
+            <a:r>
+              <a:rPr sz="1800" dirty="0" err="1"/>
+              <a:t>redondante</a:t>
+            </a:r>
+            <a:r>
+              <a:rPr sz="1800" dirty="0"/>
+              <a:t>, </a:t>
+            </a:r>
+            <a:r>
+              <a:rPr sz="1800" dirty="0" err="1"/>
+              <a:t>texte</a:t>
+            </a:r>
+            <a:r>
+              <a:rPr sz="1800" dirty="0"/>
+              <a:t> </a:t>
+            </a:r>
+            <a:r>
+              <a:rPr sz="1800" dirty="0" err="1"/>
+              <a:t>parfois</a:t>
+            </a:r>
+            <a:r>
+              <a:rPr sz="1800" dirty="0"/>
+              <a:t> trop long pour index compact.</a:t>
+            </a:r>
+          </a:p>
+        </p:txBody>
+      </p:sp>
+    </p:spTree>
+  </p:cSld>
+  <p:clrMapOvr>
+    <a:masterClrMapping/>
+  </p:clrMapOvr>
+</p:sld>
+</file>
+
+<file path=ppt/slides/slide35.xml><?xml version="1.0" encoding="utf-8"?>
+<p:sld xmlns:a="http://schemas.openxmlformats.org/drawingml/2006/main" xmlns:r="http://schemas.openxmlformats.org/officeDocument/2006/relationships" xmlns:p="http://schemas.openxmlformats.org/presentationml/2006/main">
+  <p:cSld>
+    <p:spTree>
+      <p:nvGrpSpPr>
+        <p:cNvPr id="1" name=""/>
+        <p:cNvGrpSpPr/>
+        <p:nvPr/>
+      </p:nvGrpSpPr>
+      <p:grpSpPr>
+        <a:xfrm>
+          <a:off x="0" y="0"/>
+          <a:ext cx="0" cy="0"/>
+          <a:chOff x="0" y="0"/>
+          <a:chExt cx="0" cy="0"/>
+        </a:xfrm>
+      </p:grpSpPr>
+      <p:sp>
+        <p:nvSpPr>
+          <p:cNvPr id="2" name="Title 1"/>
+          <p:cNvSpPr>
+            <a:spLocks noGrp="1"/>
+          </p:cNvSpPr>
+          <p:nvPr>
+            <p:ph type="title"/>
+          </p:nvPr>
+        </p:nvSpPr>
+        <p:spPr/>
+        <p:txBody>
+          <a:bodyPr/>
+          <a:lstStyle/>
+          <a:p>
+            <a:r>
+              <a:t>Preuve concrete - Issue #333 (qualite Alfred)</a:t>
+            </a:r>
+          </a:p>
+        </p:txBody>
+      </p:sp>
+      <p:sp>
+        <p:nvSpPr>
+          <p:cNvPr id="3" name="Content Placeholder 2"/>
+          <p:cNvSpPr>
+            <a:spLocks noGrp="1"/>
+          </p:cNvSpPr>
+          <p:nvPr>
+            <p:ph idx="1"/>
+          </p:nvPr>
+        </p:nvSpPr>
+        <p:spPr>
+          <a:xfrm>
+            <a:off x="457200" y="1783080"/>
+            <a:ext cx="8229600" cy="4525963"/>
+          </a:xfrm>
+        </p:spPr>
+        <p:txBody>
+          <a:bodyPr>
+            <a:normAutofit/>
+          </a:bodyPr>
+          <a:lstStyle/>
+          <a:p>
+            <a:r>
+              <a:rPr sz="1800" dirty="0"/>
+              <a:t>Capture 'About STM32CubeIDE' </a:t>
+            </a:r>
+            <a:r>
+              <a:rPr sz="1800" dirty="0" err="1"/>
+              <a:t>detectee</a:t>
+            </a:r>
+            <a:r>
+              <a:rPr sz="1800" dirty="0"/>
+              <a:t> dans </a:t>
+            </a:r>
+            <a:r>
+              <a:rPr sz="1800" dirty="0" err="1"/>
+              <a:t>st_ready_text</a:t>
+            </a:r>
+            <a:endParaRPr lang="fr-FR" sz="1800" dirty="0"/>
+          </a:p>
+          <a:p>
+            <a:endParaRPr sz="1800" dirty="0"/>
+          </a:p>
+          <a:p>
+            <a:r>
+              <a:rPr sz="1800" dirty="0"/>
+              <a:t>Extrait A: product name + version/build timestamp</a:t>
+            </a:r>
+            <a:endParaRPr lang="fr-FR" sz="1800" dirty="0"/>
+          </a:p>
+          <a:p>
+            <a:endParaRPr sz="1800" dirty="0"/>
+          </a:p>
+          <a:p>
+            <a:r>
+              <a:rPr sz="1800" dirty="0"/>
+              <a:t>Extrait B: Version 2.0.0 + Build 26820 </a:t>
+            </a:r>
+            <a:r>
+              <a:rPr sz="1800" dirty="0" err="1"/>
+              <a:t>explicites</a:t>
+            </a:r>
+            <a:endParaRPr lang="fr-FR" sz="1800" dirty="0"/>
+          </a:p>
+          <a:p>
+            <a:endParaRPr sz="1800" dirty="0"/>
+          </a:p>
+          <a:p>
+            <a:r>
+              <a:rPr sz="1800" dirty="0"/>
+              <a:t>Verdict: forte </a:t>
+            </a:r>
+            <a:r>
+              <a:rPr sz="1800" dirty="0" err="1"/>
+              <a:t>valeur</a:t>
+            </a:r>
+            <a:r>
+              <a:rPr sz="1800" dirty="0"/>
+              <a:t> diagnostic (version </a:t>
+            </a:r>
+            <a:r>
+              <a:rPr sz="1800" dirty="0" err="1"/>
+              <a:t>outillage</a:t>
+            </a:r>
+            <a:r>
+              <a:rPr sz="1800" dirty="0"/>
+              <a:t> searchable et </a:t>
+            </a:r>
+            <a:r>
+              <a:rPr sz="1800" dirty="0" err="1"/>
+              <a:t>traçable</a:t>
+            </a:r>
+            <a:r>
+              <a:rPr sz="1800" dirty="0"/>
+              <a:t>).</a:t>
+            </a:r>
+            <a:endParaRPr lang="fr-FR" sz="1800" dirty="0"/>
+          </a:p>
+          <a:p>
+            <a:endParaRPr sz="1800" dirty="0"/>
+          </a:p>
+          <a:p>
+            <a:r>
+              <a:rPr sz="1800" dirty="0"/>
+              <a:t>Critique: pas de score de </a:t>
+            </a:r>
+            <a:r>
+              <a:rPr sz="1800" dirty="0" err="1"/>
+              <a:t>confiance</a:t>
+            </a:r>
+            <a:r>
+              <a:rPr sz="1800" dirty="0"/>
+              <a:t>, </a:t>
+            </a:r>
+            <a:r>
+              <a:rPr sz="1800" dirty="0" err="1"/>
+              <a:t>qualite</a:t>
+            </a:r>
+            <a:r>
+              <a:rPr sz="1800" dirty="0"/>
+              <a:t> depend de la </a:t>
+            </a:r>
+            <a:r>
+              <a:rPr sz="1800" dirty="0" err="1"/>
+              <a:t>lisibilite</a:t>
+            </a:r>
+            <a:r>
+              <a:rPr sz="1800" dirty="0"/>
+              <a:t> image/OCR.</a:t>
+            </a:r>
+          </a:p>
+        </p:txBody>
+      </p:sp>
+    </p:spTree>
+  </p:cSld>
+  <p:clrMapOvr>
+    <a:masterClrMapping/>
+  </p:clrMapOvr>
+</p:sld>
+</file>
+
+<file path=ppt/slides/slide36.xml><?xml version="1.0" encoding="utf-8"?>
+<p:sld xmlns:a="http://schemas.openxmlformats.org/drawingml/2006/main" xmlns:r="http://schemas.openxmlformats.org/officeDocument/2006/relationships" xmlns:p="http://schemas.openxmlformats.org/presentationml/2006/main">
+  <p:cSld>
+    <p:spTree>
+      <p:nvGrpSpPr>
+        <p:cNvPr id="1" name=""/>
+        <p:cNvGrpSpPr/>
+        <p:nvPr/>
+      </p:nvGrpSpPr>
+      <p:grpSpPr>
+        <a:xfrm>
+          <a:off x="0" y="0"/>
+          <a:ext cx="0" cy="0"/>
+          <a:chOff x="0" y="0"/>
+          <a:chExt cx="0" cy="0"/>
+        </a:xfrm>
+      </p:grpSpPr>
+      <p:sp>
+        <p:nvSpPr>
+          <p:cNvPr id="2" name="Title 1"/>
+          <p:cNvSpPr>
+            <a:spLocks noGrp="1"/>
+          </p:cNvSpPr>
+          <p:nvPr>
+            <p:ph type="title"/>
+          </p:nvPr>
+        </p:nvSpPr>
+        <p:spPr/>
+        <p:txBody>
+          <a:bodyPr/>
+          <a:lstStyle/>
+          <a:p>
+            <a:r>
+              <a:t>Exemple Files/PDF - sortie Alfred + critique</a:t>
             </a:r>
           </a:p>
         </p:txBody>
@@ -15449,197 +15844,25 @@
           <a:lstStyle/>
           <a:p>
             <a:r>
-              <a:t>JSON concret compare (H7): st_ready_issues_with_images_stm32cubeh7.json vs ..._with_alfred_image_text.json</a:t>
-            </a:r>
-          </a:p>
-          <a:p>
-            <a:pPr/>
-            <a:r>
-              <a:t>Extrait A: [IMAGE DESCRIPTION] Screenshot of an Eclipse/STM32CubeIDE project properties window on Tool Settings...</a:t>
-            </a:r>
-          </a:p>
-          <a:p>
-            <a:pPr/>
-            <a:r>
-              <a:t>Extrait B: [IMAGE DESCRIPTION] Screenshot of an Eclipse-based STM32CubeIDE project properties/build settings window...</a:t>
-            </a:r>
-          </a:p>
-          <a:p>
-            <a:pPr/>
-            <a:r>
-              <a:t>Verdict: description pertinente et utile pour retrieval (contexte build/linker bien capture).</a:t>
-            </a:r>
-          </a:p>
-          <a:p>
-            <a:pPr/>
-            <a:r>
-              <a:t>Critique: formulation redondante, texte parfois trop long pour index compact.</a:t>
-            </a:r>
-          </a:p>
-        </p:txBody>
-      </p:sp>
-    </p:spTree>
-  </p:cSld>
-  <p:clrMapOvr>
-    <a:masterClrMapping/>
-  </p:clrMapOvr>
-</p:sld>
-</file>
-
-<file path=ppt/slides/slide35.xml><?xml version="1.0" encoding="utf-8"?>
-<p:sld xmlns:a="http://schemas.openxmlformats.org/drawingml/2006/main" xmlns:p="http://schemas.openxmlformats.org/presentationml/2006/main" xmlns:r="http://schemas.openxmlformats.org/officeDocument/2006/relationships">
-  <p:cSld>
-    <p:spTree>
-      <p:nvGrpSpPr>
-        <p:cNvPr id="1" name=""/>
-        <p:cNvGrpSpPr/>
-        <p:nvPr/>
-      </p:nvGrpSpPr>
-      <p:grpSpPr/>
-      <p:sp>
-        <p:nvSpPr>
-          <p:cNvPr id="2" name="Title 1"/>
-          <p:cNvSpPr>
-            <a:spLocks noGrp="1"/>
-          </p:cNvSpPr>
-          <p:nvPr>
-            <p:ph type="title"/>
-          </p:nvPr>
-        </p:nvSpPr>
-        <p:spPr/>
-        <p:txBody>
-          <a:bodyPr/>
-          <a:lstStyle/>
-          <a:p>
-            <a:r>
-              <a:t>Preuve concrete - Issue #333 (qualite Alfred)</a:t>
-            </a:r>
-          </a:p>
-        </p:txBody>
-      </p:sp>
-      <p:sp>
-        <p:nvSpPr>
-          <p:cNvPr id="3" name="Content Placeholder 2"/>
-          <p:cNvSpPr>
-            <a:spLocks noGrp="1"/>
-          </p:cNvSpPr>
-          <p:nvPr>
-            <p:ph idx="1"/>
-          </p:nvPr>
-        </p:nvSpPr>
-        <p:spPr/>
-        <p:txBody>
-          <a:bodyPr/>
-          <a:lstStyle/>
-          <a:p>
-            <a:r>
-              <a:t>Capture 'About STM32CubeIDE' detectee dans st_ready_text</a:t>
-            </a:r>
-          </a:p>
-          <a:p>
-            <a:pPr/>
-            <a:r>
-              <a:t>Extrait A: product name + version/build timestamp</a:t>
-            </a:r>
-          </a:p>
-          <a:p>
-            <a:pPr/>
-            <a:r>
-              <a:t>Extrait B: Version 2.0.0 + Build 26820 explicites</a:t>
-            </a:r>
-          </a:p>
-          <a:p>
-            <a:pPr/>
-            <a:r>
-              <a:t>Verdict: forte valeur diagnostic (version outillage searchable et traçable).</a:t>
-            </a:r>
-          </a:p>
-          <a:p>
-            <a:pPr/>
-            <a:r>
-              <a:t>Critique: pas de score de confiance, qualite depend de la lisibilite image/OCR.</a:t>
-            </a:r>
-          </a:p>
-        </p:txBody>
-      </p:sp>
-    </p:spTree>
-  </p:cSld>
-  <p:clrMapOvr>
-    <a:masterClrMapping/>
-  </p:clrMapOvr>
-</p:sld>
-</file>
-
-<file path=ppt/slides/slide36.xml><?xml version="1.0" encoding="utf-8"?>
-<p:sld xmlns:a="http://schemas.openxmlformats.org/drawingml/2006/main" xmlns:p="http://schemas.openxmlformats.org/presentationml/2006/main" xmlns:r="http://schemas.openxmlformats.org/officeDocument/2006/relationships">
-  <p:cSld>
-    <p:spTree>
-      <p:nvGrpSpPr>
-        <p:cNvPr id="1" name=""/>
-        <p:cNvGrpSpPr/>
-        <p:nvPr/>
-      </p:nvGrpSpPr>
-      <p:grpSpPr/>
-      <p:sp>
-        <p:nvSpPr>
-          <p:cNvPr id="2" name="Title 1"/>
-          <p:cNvSpPr>
-            <a:spLocks noGrp="1"/>
-          </p:cNvSpPr>
-          <p:nvPr>
-            <p:ph type="title"/>
-          </p:nvPr>
-        </p:nvSpPr>
-        <p:spPr/>
-        <p:txBody>
-          <a:bodyPr/>
-          <a:lstStyle/>
-          <a:p>
-            <a:r>
-              <a:t>Exemple Files/PDF - sortie Alfred + critique</a:t>
-            </a:r>
-          </a:p>
-        </p:txBody>
-      </p:sp>
-      <p:sp>
-        <p:nvSpPr>
-          <p:cNvPr id="3" name="Content Placeholder 2"/>
-          <p:cNvSpPr>
-            <a:spLocks noGrp="1"/>
-          </p:cNvSpPr>
-          <p:nvPr>
-            <p:ph idx="1"/>
-          </p:nvPr>
-        </p:nvSpPr>
-        <p:spPr/>
-        <p:txBody>
-          <a:bodyPr/>
-          <a:lstStyle/>
-          <a:p>
-            <a:r>
               <a:t>Source concrete: data/pdf_image_descriptions.json</a:t>
             </a:r>
           </a:p>
           <a:p>
-            <a:pPr/>
             <a:r>
               <a:t>Figure ID: STM32CubeWL:Documentation/STM32CubeWLGettingStarted.pdf:p2:f1</a:t>
             </a:r>
           </a:p>
           <a:p>
-            <a:pPr/>
             <a:r>
               <a:t>Sortie: layered software stack diagram (applications, middleware, HAL/LL, utilities).</a:t>
             </a:r>
           </a:p>
           <a:p>
-            <a:pPr/>
             <a:r>
               <a:t>Verdict: semantique precise et exploitable pour RAG sur docs PDF.</a:t>
             </a:r>
           </a:p>
           <a:p>
-            <a:pPr/>
             <a:r>
               <a:t>Critique: certaines sorties sont verbeuses et parfois sur-descriptives sur tableaux non techniques.</a:t>
             </a:r>
